--- a/admin/public/nds/kit-digital/nds/station-jeu_A4_brigade-verte-2_editable.pptx
+++ b/admin/public/nds/kit-digital/nds/station-jeu_A4_brigade-verte-2_editable.pptx
@@ -3146,8 +3146,8 @@
         </p:nvSpPr>
         <p:spPr>
           <a:xfrm>
-            <a:off x="5612302" y="574576"/>
-            <a:ext cx="1663200" cy="513216"/>
+            <a:off x="3961297" y="574576"/>
+            <a:ext cx="3314205" cy="513216"/>
           </a:xfrm>
           <a:prstGeom prst="roundRect">
             <a:avLst>
